--- a/low-tech/pitch-narrative.pptx
+++ b/low-tech/pitch-narrative.pptx
@@ -509,34 +509,39 @@
           <a:lstStyle/>
           <a:p>
             <a:r>
-              <a:t>AI PROMPT (paste into ChatGPT or Claude):</a:t>
+              <a:t>AI PROMPT (paste into ChatGPT or Claude):
+I am building [describe your startup in 2-3 sentences]. Help me build my pitch narrative. For each of these 10 elements (Hook, Problem, Solution, Market, Product, Business Model, Traction, Team, Vision, The Ask), ask me about:
+1. Key Narrative - the core message for this element
+2. Proof Points - what backs it up and makes it credible
+3. So What? - why an investor should care
+Challenge weak claims and rate my pitch readiness as Strong, Moderate, Weak, or Assumption. Help me build a compelling story, not just a list of facts.</a:t>
             </a:r>
           </a:p>
           <a:p/>
           <a:p>
             <a:r>
-              <a:t>I am building [describe your startup in 2-3 sentences]. Help me fill in my evidence grid. For each of these 10 elements (Hook, Problem, Solution, Market, Product, Business Model, Traction, Team, Vision, The Ask), ask me about:</a:t>
-            </a:r>
-          </a:p>
-          <a:p>
-            <a:r>
-              <a:t>1. Key Narrative - the core message for this element</a:t>
-            </a:r>
-          </a:p>
-          <a:p>
-            <a:r>
-              <a:t>2. Proof Points - specific evidence that backs it up</a:t>
-            </a:r>
-          </a:p>
-          <a:p>
-            <a:r>
-              <a:t>3. So What? - why this matters to an investor</a:t>
+              <a:t/>
+            </a:r>
+          </a:p>
+          <a:p>
+            <a:r>
+              <a:t/>
+            </a:r>
+          </a:p>
+          <a:p>
+            <a:r>
+              <a:t/>
+            </a:r>
+          </a:p>
+          <a:p>
+            <a:r>
+              <a:t/>
             </a:r>
           </a:p>
           <a:p/>
           <a:p>
             <a:r>
-              <a:t>Challenge every claim and rate my evidence as Strong, Moderate, Weak, or Assumption. Be honest and push back where my evidence is thin.</a:t>
+              <a:t/>
             </a:r>
           </a:p>
         </p:txBody>
@@ -606,34 +611,39 @@
           <a:lstStyle/>
           <a:p>
             <a:r>
-              <a:t>AI PROMPT (paste into ChatGPT or Claude):</a:t>
+              <a:t>AI PROMPT (paste into ChatGPT or Claude):
+I am building [describe your startup in 2-3 sentences]. Help me build my pitch narrative. For each of these 10 elements (Hook, Problem, Solution, Market, Product, Business Model, Traction, Team, Vision, The Ask), ask me about:
+1. Key Narrative - the core message for this element
+2. Proof Points - what backs it up and makes it credible
+3. So What? - why an investor should care
+Challenge weak claims and rate my pitch readiness as Strong, Moderate, Weak, or Assumption. Help me build a compelling story, not just a list of facts.</a:t>
             </a:r>
           </a:p>
           <a:p/>
           <a:p>
             <a:r>
-              <a:t>I am building [describe your startup in 2-3 sentences]. Help me fill in my evidence grid. For each of these 10 elements (Hook, Problem, Solution, Market, Product, Business Model, Traction, Team, Vision, The Ask), ask me about:</a:t>
-            </a:r>
-          </a:p>
-          <a:p>
-            <a:r>
-              <a:t>1. Key Narrative - the core message for this element</a:t>
-            </a:r>
-          </a:p>
-          <a:p>
-            <a:r>
-              <a:t>2. Proof Points - specific evidence that backs it up</a:t>
-            </a:r>
-          </a:p>
-          <a:p>
-            <a:r>
-              <a:t>3. So What? - why this matters to an investor</a:t>
+              <a:t/>
+            </a:r>
+          </a:p>
+          <a:p>
+            <a:r>
+              <a:t/>
+            </a:r>
+          </a:p>
+          <a:p>
+            <a:r>
+              <a:t/>
+            </a:r>
+          </a:p>
+          <a:p>
+            <a:r>
+              <a:t/>
             </a:r>
           </a:p>
           <a:p/>
           <a:p>
             <a:r>
-              <a:t>Challenge every claim and rate my evidence as Strong, Moderate, Weak, or Assumption. Be honest and push back where my evidence is thin.</a:t>
+              <a:t/>
             </a:r>
           </a:p>
         </p:txBody>
@@ -703,34 +713,39 @@
           <a:lstStyle/>
           <a:p>
             <a:r>
-              <a:t>AI PROMPT (paste into ChatGPT or Claude):</a:t>
+              <a:t>AI PROMPT (paste into ChatGPT or Claude):
+I am building [describe your startup in 2-3 sentences]. Help me build my pitch narrative. For each of these 10 elements (Hook, Problem, Solution, Market, Product, Business Model, Traction, Team, Vision, The Ask), ask me about:
+1. Key Narrative - the core message for this element
+2. Proof Points - what backs it up and makes it credible
+3. So What? - why an investor should care
+Challenge weak claims and rate my pitch readiness as Strong, Moderate, Weak, or Assumption. Help me build a compelling story, not just a list of facts.</a:t>
             </a:r>
           </a:p>
           <a:p/>
           <a:p>
             <a:r>
-              <a:t>I am building [describe your startup in 2-3 sentences]. Help me fill in my evidence grid. For each of these 10 elements (Hook, Problem, Solution, Market, Product, Business Model, Traction, Team, Vision, The Ask), ask me about:</a:t>
-            </a:r>
-          </a:p>
-          <a:p>
-            <a:r>
-              <a:t>1. Key Narrative - the core message for this element</a:t>
-            </a:r>
-          </a:p>
-          <a:p>
-            <a:r>
-              <a:t>2. Proof Points - specific evidence that backs it up</a:t>
-            </a:r>
-          </a:p>
-          <a:p>
-            <a:r>
-              <a:t>3. So What? - why this matters to an investor</a:t>
+              <a:t/>
+            </a:r>
+          </a:p>
+          <a:p>
+            <a:r>
+              <a:t/>
+            </a:r>
+          </a:p>
+          <a:p>
+            <a:r>
+              <a:t/>
+            </a:r>
+          </a:p>
+          <a:p>
+            <a:r>
+              <a:t/>
             </a:r>
           </a:p>
           <a:p/>
           <a:p>
             <a:r>
-              <a:t>Challenge every claim and rate my evidence as Strong, Moderate, Weak, or Assumption. Be honest and push back where my evidence is thin.</a:t>
+              <a:t/>
             </a:r>
           </a:p>
         </p:txBody>
@@ -800,34 +815,39 @@
           <a:lstStyle/>
           <a:p>
             <a:r>
-              <a:t>AI PROMPT (paste into ChatGPT or Claude):</a:t>
+              <a:t>AI PROMPT (paste into ChatGPT or Claude):
+I am building [describe your startup in 2-3 sentences]. Help me build my pitch narrative. For each of these 10 elements (Hook, Problem, Solution, Market, Product, Business Model, Traction, Team, Vision, The Ask), ask me about:
+1. Key Narrative - the core message for this element
+2. Proof Points - what backs it up and makes it credible
+3. So What? - why an investor should care
+Challenge weak claims and rate my pitch readiness as Strong, Moderate, Weak, or Assumption. Help me build a compelling story, not just a list of facts.</a:t>
             </a:r>
           </a:p>
           <a:p/>
           <a:p>
             <a:r>
-              <a:t>I am building [describe your startup in 2-3 sentences]. Help me fill in my evidence grid. For each of these 10 elements (Hook, Problem, Solution, Market, Product, Business Model, Traction, Team, Vision, The Ask), ask me about:</a:t>
-            </a:r>
-          </a:p>
-          <a:p>
-            <a:r>
-              <a:t>1. Key Narrative - the core message for this element</a:t>
-            </a:r>
-          </a:p>
-          <a:p>
-            <a:r>
-              <a:t>2. Proof Points - specific evidence that backs it up</a:t>
-            </a:r>
-          </a:p>
-          <a:p>
-            <a:r>
-              <a:t>3. So What? - why this matters to an investor</a:t>
+              <a:t/>
+            </a:r>
+          </a:p>
+          <a:p>
+            <a:r>
+              <a:t/>
+            </a:r>
+          </a:p>
+          <a:p>
+            <a:r>
+              <a:t/>
+            </a:r>
+          </a:p>
+          <a:p>
+            <a:r>
+              <a:t/>
             </a:r>
           </a:p>
           <a:p/>
           <a:p>
             <a:r>
-              <a:t>Challenge every claim and rate my evidence as Strong, Moderate, Weak, or Assumption. Be honest and push back where my evidence is thin.</a:t>
+              <a:t/>
             </a:r>
           </a:p>
         </p:txBody>
@@ -897,34 +917,39 @@
           <a:lstStyle/>
           <a:p>
             <a:r>
-              <a:t>AI PROMPT (paste into ChatGPT or Claude):</a:t>
+              <a:t>AI PROMPT (paste into ChatGPT or Claude):
+I am building [describe your startup in 2-3 sentences]. Help me build my pitch narrative. For each of these 10 elements (Hook, Problem, Solution, Market, Product, Business Model, Traction, Team, Vision, The Ask), ask me about:
+1. Key Narrative - the core message for this element
+2. Proof Points - what backs it up and makes it credible
+3. So What? - why an investor should care
+Challenge weak claims and rate my pitch readiness as Strong, Moderate, Weak, or Assumption. Help me build a compelling story, not just a list of facts.</a:t>
             </a:r>
           </a:p>
           <a:p/>
           <a:p>
             <a:r>
-              <a:t>I am building [describe your startup in 2-3 sentences]. Help me fill in my evidence grid. For each of these 10 elements (Hook, Problem, Solution, Market, Product, Business Model, Traction, Team, Vision, The Ask), ask me about:</a:t>
-            </a:r>
-          </a:p>
-          <a:p>
-            <a:r>
-              <a:t>1. Key Narrative - the core message for this element</a:t>
-            </a:r>
-          </a:p>
-          <a:p>
-            <a:r>
-              <a:t>2. Proof Points - specific evidence that backs it up</a:t>
-            </a:r>
-          </a:p>
-          <a:p>
-            <a:r>
-              <a:t>3. So What? - why this matters to an investor</a:t>
+              <a:t/>
+            </a:r>
+          </a:p>
+          <a:p>
+            <a:r>
+              <a:t/>
+            </a:r>
+          </a:p>
+          <a:p>
+            <a:r>
+              <a:t/>
+            </a:r>
+          </a:p>
+          <a:p>
+            <a:r>
+              <a:t/>
             </a:r>
           </a:p>
           <a:p/>
           <a:p>
             <a:r>
-              <a:t>Challenge every claim and rate my evidence as Strong, Moderate, Weak, or Assumption. Be honest and push back where my evidence is thin.</a:t>
+              <a:t/>
             </a:r>
           </a:p>
         </p:txBody>
@@ -994,34 +1019,39 @@
           <a:lstStyle/>
           <a:p>
             <a:r>
-              <a:t>AI PROMPT (paste into ChatGPT or Claude):</a:t>
+              <a:t>AI PROMPT (paste into ChatGPT or Claude):
+I am building [describe your startup in 2-3 sentences]. Help me build my pitch narrative. For each of these 10 elements (Hook, Problem, Solution, Market, Product, Business Model, Traction, Team, Vision, The Ask), ask me about:
+1. Key Narrative - the core message for this element
+2. Proof Points - what backs it up and makes it credible
+3. So What? - why an investor should care
+Challenge weak claims and rate my pitch readiness as Strong, Moderate, Weak, or Assumption. Help me build a compelling story, not just a list of facts.</a:t>
             </a:r>
           </a:p>
           <a:p/>
           <a:p>
             <a:r>
-              <a:t>I am building [describe your startup in 2-3 sentences]. Help me fill in my evidence grid. For each of these 10 elements (Hook, Problem, Solution, Market, Product, Business Model, Traction, Team, Vision, The Ask), ask me about:</a:t>
-            </a:r>
-          </a:p>
-          <a:p>
-            <a:r>
-              <a:t>1. Key Narrative - the core message for this element</a:t>
-            </a:r>
-          </a:p>
-          <a:p>
-            <a:r>
-              <a:t>2. Proof Points - specific evidence that backs it up</a:t>
-            </a:r>
-          </a:p>
-          <a:p>
-            <a:r>
-              <a:t>3. So What? - why this matters to an investor</a:t>
+              <a:t/>
+            </a:r>
+          </a:p>
+          <a:p>
+            <a:r>
+              <a:t/>
+            </a:r>
+          </a:p>
+          <a:p>
+            <a:r>
+              <a:t/>
+            </a:r>
+          </a:p>
+          <a:p>
+            <a:r>
+              <a:t/>
             </a:r>
           </a:p>
           <a:p/>
           <a:p>
             <a:r>
-              <a:t>Challenge every claim and rate my evidence as Strong, Moderate, Weak, or Assumption. Be honest and push back where my evidence is thin.</a:t>
+              <a:t/>
             </a:r>
           </a:p>
         </p:txBody>
@@ -1091,34 +1121,39 @@
           <a:lstStyle/>
           <a:p>
             <a:r>
-              <a:t>AI PROMPT (paste into ChatGPT or Claude):</a:t>
+              <a:t>AI PROMPT (paste into ChatGPT or Claude):
+I am building [describe your startup in 2-3 sentences]. Help me build my pitch narrative. For each of these 10 elements (Hook, Problem, Solution, Market, Product, Business Model, Traction, Team, Vision, The Ask), ask me about:
+1. Key Narrative - the core message for this element
+2. Proof Points - what backs it up and makes it credible
+3. So What? - why an investor should care
+Challenge weak claims and rate my pitch readiness as Strong, Moderate, Weak, or Assumption. Help me build a compelling story, not just a list of facts.</a:t>
             </a:r>
           </a:p>
           <a:p/>
           <a:p>
             <a:r>
-              <a:t>I am building [describe your startup in 2-3 sentences]. Help me fill in my evidence grid. For each of these 10 elements (Hook, Problem, Solution, Market, Product, Business Model, Traction, Team, Vision, The Ask), ask me about:</a:t>
-            </a:r>
-          </a:p>
-          <a:p>
-            <a:r>
-              <a:t>1. Key Narrative - the core message for this element</a:t>
-            </a:r>
-          </a:p>
-          <a:p>
-            <a:r>
-              <a:t>2. Proof Points - specific evidence that backs it up</a:t>
-            </a:r>
-          </a:p>
-          <a:p>
-            <a:r>
-              <a:t>3. So What? - why this matters to an investor</a:t>
+              <a:t/>
+            </a:r>
+          </a:p>
+          <a:p>
+            <a:r>
+              <a:t/>
+            </a:r>
+          </a:p>
+          <a:p>
+            <a:r>
+              <a:t/>
+            </a:r>
+          </a:p>
+          <a:p>
+            <a:r>
+              <a:t/>
             </a:r>
           </a:p>
           <a:p/>
           <a:p>
             <a:r>
-              <a:t>Challenge every claim and rate my evidence as Strong, Moderate, Weak, or Assumption. Be honest and push back where my evidence is thin.</a:t>
+              <a:t/>
             </a:r>
           </a:p>
         </p:txBody>
@@ -4170,7 +4205,7 @@
                 </a:solidFill>
                 <a:latin typeface="Calibri"/>
               </a:rPr>
-              <a:t>Evidence Grid + Storytelling</a:t>
+              <a:t>Pitch Substance + Storytelling</a:t>
             </a:r>
           </a:p>
         </p:txBody>
@@ -4222,7 +4257,7 @@
                 </a:solidFill>
                 <a:latin typeface="Calibri"/>
               </a:rPr>
-              <a:t>The Evidence Grid</a:t>
+              <a:t>The Pitch Substance</a:t>
             </a:r>
           </a:p>
         </p:txBody>
@@ -4477,7 +4512,7 @@
                 </a:solidFill>
                 <a:latin typeface="Calibri"/>
               </a:rPr>
-              <a:t>Evidence Grid Template</a:t>
+              <a:t>Pitch Substance Template</a:t>
             </a:r>
           </a:p>
         </p:txBody>

--- a/low-tech/pitch-narrative.pptx
+++ b/low-tech/pitch-narrative.pptx
@@ -4461,6 +4461,69 @@
                 <a:latin typeface="Calibri"/>
               </a:rPr>
               <a:t>fill every cell honestly, then strengthen the weak ones.</a:t>
+            </a:r>
+          </a:p>
+        </p:txBody>
+      </p:sp>
+      <p:sp>
+        <p:nvSpPr>
+          <p:cNvPr id="4" name="TextBox 3"/>
+          <p:cNvSpPr txBox="1"/>
+          <p:nvPr/>
+        </p:nvSpPr>
+        <p:spPr>
+          <a:xfrm>
+            <a:off x="457200" y="5029200"/>
+            <a:ext cx="8229600" cy="1645920"/>
+          </a:xfrm>
+          <a:prstGeom prst="rect">
+            <a:avLst/>
+          </a:prstGeom>
+          <a:solidFill>
+            <a:srgbClr val="FFF7ED"/>
+          </a:solidFill>
+          <a:ln w="12700">
+            <a:solidFill>
+              <a:srgbClr val="EA580D"/>
+            </a:solidFill>
+          </a:ln>
+        </p:spPr>
+        <p:txBody>
+          <a:bodyPr wrap="square">
+            <a:spAutoFit/>
+          </a:bodyPr>
+          <a:lstStyle/>
+          <a:p>
+            <a:r>
+              <a:rPr sz="800" b="1">
+                <a:solidFill>
+                  <a:srgbClr val="EA580D"/>
+                </a:solidFill>
+              </a:rPr>
+              <a:t>AI COACH PROMPT</a:t>
+            </a:r>
+          </a:p>
+          <a:p>
+            <a:r>
+              <a:rPr sz="700">
+                <a:solidFill>
+                  <a:srgbClr val="64748B"/>
+                </a:solidFill>
+              </a:rPr>
+              <a:t>Copy the text below and paste it into ChatGPT, Claude, or any AI tool:</a:t>
+            </a:r>
+          </a:p>
+          <a:p>
+            <a:r>
+              <a:rPr sz="700" i="1">
+                <a:solidFill>
+                  <a:srgbClr val="0F172A"/>
+                </a:solidFill>
+              </a:rPr>
+              <a:t>I am building [describe your startup in 2-3 sentences]. Help me build my pitch narrative. For each of these 10 elements (Hook, Problem, Solution, Market, Product, Business Model, Traction, Team, Vision, The Ask), ask me about:
+1. Key Narrative - the core message for this element
+2. Proof Points - what backs it up and makes it credible
+3. So What...</a:t>
             </a:r>
           </a:p>
         </p:txBody>
@@ -5075,6 +5138,69 @@
           </a:graphicData>
         </a:graphic>
       </p:graphicFrame>
+      <p:sp>
+        <p:nvSpPr>
+          <p:cNvPr id="4" name="TextBox 3"/>
+          <p:cNvSpPr txBox="1"/>
+          <p:nvPr/>
+        </p:nvSpPr>
+        <p:spPr>
+          <a:xfrm>
+            <a:off x="457200" y="5029200"/>
+            <a:ext cx="8229600" cy="1645920"/>
+          </a:xfrm>
+          <a:prstGeom prst="rect">
+            <a:avLst/>
+          </a:prstGeom>
+          <a:solidFill>
+            <a:srgbClr val="FFF7ED"/>
+          </a:solidFill>
+          <a:ln w="12700">
+            <a:solidFill>
+              <a:srgbClr val="EA580D"/>
+            </a:solidFill>
+          </a:ln>
+        </p:spPr>
+        <p:txBody>
+          <a:bodyPr wrap="square">
+            <a:spAutoFit/>
+          </a:bodyPr>
+          <a:lstStyle/>
+          <a:p>
+            <a:r>
+              <a:rPr sz="800" b="1">
+                <a:solidFill>
+                  <a:srgbClr val="EA580D"/>
+                </a:solidFill>
+              </a:rPr>
+              <a:t>AI COACH PROMPT</a:t>
+            </a:r>
+          </a:p>
+          <a:p>
+            <a:r>
+              <a:rPr sz="700">
+                <a:solidFill>
+                  <a:srgbClr val="64748B"/>
+                </a:solidFill>
+              </a:rPr>
+              <a:t>Copy the text below and paste it into ChatGPT, Claude, or any AI tool:</a:t>
+            </a:r>
+          </a:p>
+          <a:p>
+            <a:r>
+              <a:rPr sz="700" i="1">
+                <a:solidFill>
+                  <a:srgbClr val="0F172A"/>
+                </a:solidFill>
+              </a:rPr>
+              <a:t>I am building [describe your startup in 2-3 sentences]. Help me build my pitch narrative. For each of these 10 elements (Hook, Problem, Solution, Market, Product, Business Model, Traction, Team, Vision, The Ask), ask me about:
+1. Key Narrative - the core message for this element
+2. Proof Points - what backs it up and makes it credible
+3. So What...</a:t>
+            </a:r>
+          </a:p>
+        </p:txBody>
+      </p:sp>
     </p:spTree>
   </p:cSld>
   <p:clrMapOvr>
@@ -5257,6 +5383,69 @@
           </a:p>
         </p:txBody>
       </p:sp>
+      <p:sp>
+        <p:nvSpPr>
+          <p:cNvPr id="4" name="TextBox 3"/>
+          <p:cNvSpPr txBox="1"/>
+          <p:nvPr/>
+        </p:nvSpPr>
+        <p:spPr>
+          <a:xfrm>
+            <a:off x="457200" y="5029200"/>
+            <a:ext cx="8229600" cy="1645920"/>
+          </a:xfrm>
+          <a:prstGeom prst="rect">
+            <a:avLst/>
+          </a:prstGeom>
+          <a:solidFill>
+            <a:srgbClr val="FFF7ED"/>
+          </a:solidFill>
+          <a:ln w="12700">
+            <a:solidFill>
+              <a:srgbClr val="EA580D"/>
+            </a:solidFill>
+          </a:ln>
+        </p:spPr>
+        <p:txBody>
+          <a:bodyPr wrap="square">
+            <a:spAutoFit/>
+          </a:bodyPr>
+          <a:lstStyle/>
+          <a:p>
+            <a:r>
+              <a:rPr sz="800" b="1">
+                <a:solidFill>
+                  <a:srgbClr val="EA580D"/>
+                </a:solidFill>
+              </a:rPr>
+              <a:t>AI COACH PROMPT</a:t>
+            </a:r>
+          </a:p>
+          <a:p>
+            <a:r>
+              <a:rPr sz="700">
+                <a:solidFill>
+                  <a:srgbClr val="64748B"/>
+                </a:solidFill>
+              </a:rPr>
+              <a:t>Copy the text below and paste it into ChatGPT, Claude, or any AI tool:</a:t>
+            </a:r>
+          </a:p>
+          <a:p>
+            <a:r>
+              <a:rPr sz="700" i="1">
+                <a:solidFill>
+                  <a:srgbClr val="0F172A"/>
+                </a:solidFill>
+              </a:rPr>
+              <a:t>I am building [describe your startup in 2-3 sentences]. Help me build my pitch narrative. For each of these 10 elements (Hook, Problem, Solution, Market, Product, Business Model, Traction, Team, Vision, The Ask), ask me about:
+1. Key Narrative - the core message for this element
+2. Proof Points - what backs it up and makes it credible
+3. So What...</a:t>
+            </a:r>
+          </a:p>
+        </p:txBody>
+      </p:sp>
     </p:spTree>
   </p:cSld>
   <p:clrMapOvr>
@@ -5471,6 +5660,69 @@
           </a:p>
         </p:txBody>
       </p:sp>
+      <p:sp>
+        <p:nvSpPr>
+          <p:cNvPr id="4" name="TextBox 3"/>
+          <p:cNvSpPr txBox="1"/>
+          <p:nvPr/>
+        </p:nvSpPr>
+        <p:spPr>
+          <a:xfrm>
+            <a:off x="457200" y="5029200"/>
+            <a:ext cx="8229600" cy="1645920"/>
+          </a:xfrm>
+          <a:prstGeom prst="rect">
+            <a:avLst/>
+          </a:prstGeom>
+          <a:solidFill>
+            <a:srgbClr val="FFF7ED"/>
+          </a:solidFill>
+          <a:ln w="12700">
+            <a:solidFill>
+              <a:srgbClr val="EA580D"/>
+            </a:solidFill>
+          </a:ln>
+        </p:spPr>
+        <p:txBody>
+          <a:bodyPr wrap="square">
+            <a:spAutoFit/>
+          </a:bodyPr>
+          <a:lstStyle/>
+          <a:p>
+            <a:r>
+              <a:rPr sz="800" b="1">
+                <a:solidFill>
+                  <a:srgbClr val="EA580D"/>
+                </a:solidFill>
+              </a:rPr>
+              <a:t>AI COACH PROMPT</a:t>
+            </a:r>
+          </a:p>
+          <a:p>
+            <a:r>
+              <a:rPr sz="700">
+                <a:solidFill>
+                  <a:srgbClr val="64748B"/>
+                </a:solidFill>
+              </a:rPr>
+              <a:t>Copy the text below and paste it into ChatGPT, Claude, or any AI tool:</a:t>
+            </a:r>
+          </a:p>
+          <a:p>
+            <a:r>
+              <a:rPr sz="700" i="1">
+                <a:solidFill>
+                  <a:srgbClr val="0F172A"/>
+                </a:solidFill>
+              </a:rPr>
+              <a:t>I am building [describe your startup in 2-3 sentences]. Help me build my pitch narrative. For each of these 10 elements (Hook, Problem, Solution, Market, Product, Business Model, Traction, Team, Vision, The Ask), ask me about:
+1. Key Narrative - the core message for this element
+2. Proof Points - what backs it up and makes it credible
+3. So What...</a:t>
+            </a:r>
+          </a:p>
+        </p:txBody>
+      </p:sp>
     </p:spTree>
   </p:cSld>
   <p:clrMapOvr>
@@ -5796,6 +6048,69 @@
           </a:p>
         </p:txBody>
       </p:sp>
+      <p:sp>
+        <p:nvSpPr>
+          <p:cNvPr id="4" name="TextBox 3"/>
+          <p:cNvSpPr txBox="1"/>
+          <p:nvPr/>
+        </p:nvSpPr>
+        <p:spPr>
+          <a:xfrm>
+            <a:off x="457200" y="5029200"/>
+            <a:ext cx="8229600" cy="1645920"/>
+          </a:xfrm>
+          <a:prstGeom prst="rect">
+            <a:avLst/>
+          </a:prstGeom>
+          <a:solidFill>
+            <a:srgbClr val="FFF7ED"/>
+          </a:solidFill>
+          <a:ln w="12700">
+            <a:solidFill>
+              <a:srgbClr val="EA580D"/>
+            </a:solidFill>
+          </a:ln>
+        </p:spPr>
+        <p:txBody>
+          <a:bodyPr wrap="square">
+            <a:spAutoFit/>
+          </a:bodyPr>
+          <a:lstStyle/>
+          <a:p>
+            <a:r>
+              <a:rPr sz="800" b="1">
+                <a:solidFill>
+                  <a:srgbClr val="EA580D"/>
+                </a:solidFill>
+              </a:rPr>
+              <a:t>AI COACH PROMPT</a:t>
+            </a:r>
+          </a:p>
+          <a:p>
+            <a:r>
+              <a:rPr sz="700">
+                <a:solidFill>
+                  <a:srgbClr val="64748B"/>
+                </a:solidFill>
+              </a:rPr>
+              <a:t>Copy the text below and paste it into ChatGPT, Claude, or any AI tool:</a:t>
+            </a:r>
+          </a:p>
+          <a:p>
+            <a:r>
+              <a:rPr sz="700" i="1">
+                <a:solidFill>
+                  <a:srgbClr val="0F172A"/>
+                </a:solidFill>
+              </a:rPr>
+              <a:t>I am building [describe your startup in 2-3 sentences]. Help me build my pitch narrative. For each of these 10 elements (Hook, Problem, Solution, Market, Product, Business Model, Traction, Team, Vision, The Ask), ask me about:
+1. Key Narrative - the core message for this element
+2. Proof Points - what backs it up and makes it credible
+3. So What...</a:t>
+            </a:r>
+          </a:p>
+        </p:txBody>
+      </p:sp>
     </p:spTree>
   </p:cSld>
   <p:clrMapOvr>
@@ -6060,6 +6375,69 @@
           </a:p>
         </p:txBody>
       </p:sp>
+      <p:sp>
+        <p:nvSpPr>
+          <p:cNvPr id="4" name="TextBox 3"/>
+          <p:cNvSpPr txBox="1"/>
+          <p:nvPr/>
+        </p:nvSpPr>
+        <p:spPr>
+          <a:xfrm>
+            <a:off x="457200" y="5029200"/>
+            <a:ext cx="8229600" cy="1645920"/>
+          </a:xfrm>
+          <a:prstGeom prst="rect">
+            <a:avLst/>
+          </a:prstGeom>
+          <a:solidFill>
+            <a:srgbClr val="FFF7ED"/>
+          </a:solidFill>
+          <a:ln w="12700">
+            <a:solidFill>
+              <a:srgbClr val="EA580D"/>
+            </a:solidFill>
+          </a:ln>
+        </p:spPr>
+        <p:txBody>
+          <a:bodyPr wrap="square">
+            <a:spAutoFit/>
+          </a:bodyPr>
+          <a:lstStyle/>
+          <a:p>
+            <a:r>
+              <a:rPr sz="800" b="1">
+                <a:solidFill>
+                  <a:srgbClr val="EA580D"/>
+                </a:solidFill>
+              </a:rPr>
+              <a:t>AI COACH PROMPT</a:t>
+            </a:r>
+          </a:p>
+          <a:p>
+            <a:r>
+              <a:rPr sz="700">
+                <a:solidFill>
+                  <a:srgbClr val="64748B"/>
+                </a:solidFill>
+              </a:rPr>
+              <a:t>Copy the text below and paste it into ChatGPT, Claude, or any AI tool:</a:t>
+            </a:r>
+          </a:p>
+          <a:p>
+            <a:r>
+              <a:rPr sz="700" i="1">
+                <a:solidFill>
+                  <a:srgbClr val="0F172A"/>
+                </a:solidFill>
+              </a:rPr>
+              <a:t>I am building [describe your startup in 2-3 sentences]. Help me build my pitch narrative. For each of these 10 elements (Hook, Problem, Solution, Market, Product, Business Model, Traction, Team, Vision, The Ask), ask me about:
+1. Key Narrative - the core message for this element
+2. Proof Points - what backs it up and makes it credible
+3. So What...</a:t>
+            </a:r>
+          </a:p>
+        </p:txBody>
+      </p:sp>
     </p:spTree>
   </p:cSld>
   <p:clrMapOvr>
@@ -6306,6 +6684,69 @@
                 <a:latin typeface="Calibri"/>
               </a:rPr>
               <a:t>How does this become a large company?</a:t>
+            </a:r>
+          </a:p>
+        </p:txBody>
+      </p:sp>
+      <p:sp>
+        <p:nvSpPr>
+          <p:cNvPr id="4" name="TextBox 3"/>
+          <p:cNvSpPr txBox="1"/>
+          <p:nvPr/>
+        </p:nvSpPr>
+        <p:spPr>
+          <a:xfrm>
+            <a:off x="457200" y="5029200"/>
+            <a:ext cx="8229600" cy="1645920"/>
+          </a:xfrm>
+          <a:prstGeom prst="rect">
+            <a:avLst/>
+          </a:prstGeom>
+          <a:solidFill>
+            <a:srgbClr val="FFF7ED"/>
+          </a:solidFill>
+          <a:ln w="12700">
+            <a:solidFill>
+              <a:srgbClr val="EA580D"/>
+            </a:solidFill>
+          </a:ln>
+        </p:spPr>
+        <p:txBody>
+          <a:bodyPr wrap="square">
+            <a:spAutoFit/>
+          </a:bodyPr>
+          <a:lstStyle/>
+          <a:p>
+            <a:r>
+              <a:rPr sz="800" b="1">
+                <a:solidFill>
+                  <a:srgbClr val="EA580D"/>
+                </a:solidFill>
+              </a:rPr>
+              <a:t>AI COACH PROMPT</a:t>
+            </a:r>
+          </a:p>
+          <a:p>
+            <a:r>
+              <a:rPr sz="700">
+                <a:solidFill>
+                  <a:srgbClr val="64748B"/>
+                </a:solidFill>
+              </a:rPr>
+              <a:t>Copy the text below and paste it into ChatGPT, Claude, or any AI tool:</a:t>
+            </a:r>
+          </a:p>
+          <a:p>
+            <a:r>
+              <a:rPr sz="700" i="1">
+                <a:solidFill>
+                  <a:srgbClr val="0F172A"/>
+                </a:solidFill>
+              </a:rPr>
+              <a:t>I am building [describe your startup in 2-3 sentences]. Help me build my pitch narrative. For each of these 10 elements (Hook, Problem, Solution, Market, Product, Business Model, Traction, Team, Vision, The Ask), ask me about:
+1. Key Narrative - the core message for this element
+2. Proof Points - what backs it up and makes it credible
+3. So What...</a:t>
             </a:r>
           </a:p>
         </p:txBody>

--- a/low-tech/pitch-narrative.pptx
+++ b/low-tech/pitch-narrative.pptx
@@ -4210,6 +4210,39 @@
           </a:p>
         </p:txBody>
       </p:sp>
+      <p:sp>
+        <p:nvSpPr>
+          <p:cNvPr id="3" name="TextBox 2"/>
+          <p:cNvSpPr txBox="1"/>
+          <p:nvPr/>
+        </p:nvSpPr>
+        <p:spPr>
+          <a:xfrm>
+            <a:off x="457200" y="5760720"/>
+            <a:ext cx="8229600" cy="457200"/>
+          </a:xfrm>
+          <a:prstGeom prst="rect">
+            <a:avLst/>
+          </a:prstGeom>
+          <a:noFill/>
+        </p:spPr>
+        <p:txBody>
+          <a:bodyPr wrap="square">
+            <a:spAutoFit/>
+          </a:bodyPr>
+          <a:lstStyle/>
+          <a:p>
+            <a:r>
+              <a:rPr sz="900" b="0">
+                <a:solidFill>
+                  <a:srgbClr val="EA580D"/>
+                </a:solidFill>
+              </a:rPr>
+              <a:t>Want AI coaching? Open AI-PROMPTS.md, copy the prompt for this exercise, and paste it into ChatGPT or Claude.</a:t>
+            </a:r>
+          </a:p>
+        </p:txBody>
+      </p:sp>
     </p:spTree>
   </p:cSld>
   <p:clrMapOvr>
@@ -4461,69 +4494,6 @@
                 <a:latin typeface="Calibri"/>
               </a:rPr>
               <a:t>fill every cell honestly, then strengthen the weak ones.</a:t>
-            </a:r>
-          </a:p>
-        </p:txBody>
-      </p:sp>
-      <p:sp>
-        <p:nvSpPr>
-          <p:cNvPr id="4" name="TextBox 3"/>
-          <p:cNvSpPr txBox="1"/>
-          <p:nvPr/>
-        </p:nvSpPr>
-        <p:spPr>
-          <a:xfrm>
-            <a:off x="457200" y="5029200"/>
-            <a:ext cx="8229600" cy="1645920"/>
-          </a:xfrm>
-          <a:prstGeom prst="rect">
-            <a:avLst/>
-          </a:prstGeom>
-          <a:solidFill>
-            <a:srgbClr val="FFF7ED"/>
-          </a:solidFill>
-          <a:ln w="12700">
-            <a:solidFill>
-              <a:srgbClr val="EA580D"/>
-            </a:solidFill>
-          </a:ln>
-        </p:spPr>
-        <p:txBody>
-          <a:bodyPr wrap="square">
-            <a:spAutoFit/>
-          </a:bodyPr>
-          <a:lstStyle/>
-          <a:p>
-            <a:r>
-              <a:rPr sz="800" b="1">
-                <a:solidFill>
-                  <a:srgbClr val="EA580D"/>
-                </a:solidFill>
-              </a:rPr>
-              <a:t>AI COACH PROMPT</a:t>
-            </a:r>
-          </a:p>
-          <a:p>
-            <a:r>
-              <a:rPr sz="700">
-                <a:solidFill>
-                  <a:srgbClr val="64748B"/>
-                </a:solidFill>
-              </a:rPr>
-              <a:t>Copy the text below and paste it into ChatGPT, Claude, or any AI tool:</a:t>
-            </a:r>
-          </a:p>
-          <a:p>
-            <a:r>
-              <a:rPr sz="700" i="1">
-                <a:solidFill>
-                  <a:srgbClr val="0F172A"/>
-                </a:solidFill>
-              </a:rPr>
-              <a:t>I am building [describe your startup in 2-3 sentences]. Help me build my pitch narrative. For each of these 10 elements (Hook, Problem, Solution, Market, Product, Business Model, Traction, Team, Vision, The Ask), ask me about:
-1. Key Narrative - the core message for this element
-2. Proof Points - what backs it up and makes it credible
-3. So What...</a:t>
             </a:r>
           </a:p>
         </p:txBody>
@@ -5138,69 +5108,6 @@
           </a:graphicData>
         </a:graphic>
       </p:graphicFrame>
-      <p:sp>
-        <p:nvSpPr>
-          <p:cNvPr id="4" name="TextBox 3"/>
-          <p:cNvSpPr txBox="1"/>
-          <p:nvPr/>
-        </p:nvSpPr>
-        <p:spPr>
-          <a:xfrm>
-            <a:off x="457200" y="5029200"/>
-            <a:ext cx="8229600" cy="1645920"/>
-          </a:xfrm>
-          <a:prstGeom prst="rect">
-            <a:avLst/>
-          </a:prstGeom>
-          <a:solidFill>
-            <a:srgbClr val="FFF7ED"/>
-          </a:solidFill>
-          <a:ln w="12700">
-            <a:solidFill>
-              <a:srgbClr val="EA580D"/>
-            </a:solidFill>
-          </a:ln>
-        </p:spPr>
-        <p:txBody>
-          <a:bodyPr wrap="square">
-            <a:spAutoFit/>
-          </a:bodyPr>
-          <a:lstStyle/>
-          <a:p>
-            <a:r>
-              <a:rPr sz="800" b="1">
-                <a:solidFill>
-                  <a:srgbClr val="EA580D"/>
-                </a:solidFill>
-              </a:rPr>
-              <a:t>AI COACH PROMPT</a:t>
-            </a:r>
-          </a:p>
-          <a:p>
-            <a:r>
-              <a:rPr sz="700">
-                <a:solidFill>
-                  <a:srgbClr val="64748B"/>
-                </a:solidFill>
-              </a:rPr>
-              <a:t>Copy the text below and paste it into ChatGPT, Claude, or any AI tool:</a:t>
-            </a:r>
-          </a:p>
-          <a:p>
-            <a:r>
-              <a:rPr sz="700" i="1">
-                <a:solidFill>
-                  <a:srgbClr val="0F172A"/>
-                </a:solidFill>
-              </a:rPr>
-              <a:t>I am building [describe your startup in 2-3 sentences]. Help me build my pitch narrative. For each of these 10 elements (Hook, Problem, Solution, Market, Product, Business Model, Traction, Team, Vision, The Ask), ask me about:
-1. Key Narrative - the core message for this element
-2. Proof Points - what backs it up and makes it credible
-3. So What...</a:t>
-            </a:r>
-          </a:p>
-        </p:txBody>
-      </p:sp>
     </p:spTree>
   </p:cSld>
   <p:clrMapOvr>
@@ -5383,69 +5290,6 @@
           </a:p>
         </p:txBody>
       </p:sp>
-      <p:sp>
-        <p:nvSpPr>
-          <p:cNvPr id="4" name="TextBox 3"/>
-          <p:cNvSpPr txBox="1"/>
-          <p:nvPr/>
-        </p:nvSpPr>
-        <p:spPr>
-          <a:xfrm>
-            <a:off x="457200" y="5029200"/>
-            <a:ext cx="8229600" cy="1645920"/>
-          </a:xfrm>
-          <a:prstGeom prst="rect">
-            <a:avLst/>
-          </a:prstGeom>
-          <a:solidFill>
-            <a:srgbClr val="FFF7ED"/>
-          </a:solidFill>
-          <a:ln w="12700">
-            <a:solidFill>
-              <a:srgbClr val="EA580D"/>
-            </a:solidFill>
-          </a:ln>
-        </p:spPr>
-        <p:txBody>
-          <a:bodyPr wrap="square">
-            <a:spAutoFit/>
-          </a:bodyPr>
-          <a:lstStyle/>
-          <a:p>
-            <a:r>
-              <a:rPr sz="800" b="1">
-                <a:solidFill>
-                  <a:srgbClr val="EA580D"/>
-                </a:solidFill>
-              </a:rPr>
-              <a:t>AI COACH PROMPT</a:t>
-            </a:r>
-          </a:p>
-          <a:p>
-            <a:r>
-              <a:rPr sz="700">
-                <a:solidFill>
-                  <a:srgbClr val="64748B"/>
-                </a:solidFill>
-              </a:rPr>
-              <a:t>Copy the text below and paste it into ChatGPT, Claude, or any AI tool:</a:t>
-            </a:r>
-          </a:p>
-          <a:p>
-            <a:r>
-              <a:rPr sz="700" i="1">
-                <a:solidFill>
-                  <a:srgbClr val="0F172A"/>
-                </a:solidFill>
-              </a:rPr>
-              <a:t>I am building [describe your startup in 2-3 sentences]. Help me build my pitch narrative. For each of these 10 elements (Hook, Problem, Solution, Market, Product, Business Model, Traction, Team, Vision, The Ask), ask me about:
-1. Key Narrative - the core message for this element
-2. Proof Points - what backs it up and makes it credible
-3. So What...</a:t>
-            </a:r>
-          </a:p>
-        </p:txBody>
-      </p:sp>
     </p:spTree>
   </p:cSld>
   <p:clrMapOvr>
@@ -5660,69 +5504,6 @@
           </a:p>
         </p:txBody>
       </p:sp>
-      <p:sp>
-        <p:nvSpPr>
-          <p:cNvPr id="4" name="TextBox 3"/>
-          <p:cNvSpPr txBox="1"/>
-          <p:nvPr/>
-        </p:nvSpPr>
-        <p:spPr>
-          <a:xfrm>
-            <a:off x="457200" y="5029200"/>
-            <a:ext cx="8229600" cy="1645920"/>
-          </a:xfrm>
-          <a:prstGeom prst="rect">
-            <a:avLst/>
-          </a:prstGeom>
-          <a:solidFill>
-            <a:srgbClr val="FFF7ED"/>
-          </a:solidFill>
-          <a:ln w="12700">
-            <a:solidFill>
-              <a:srgbClr val="EA580D"/>
-            </a:solidFill>
-          </a:ln>
-        </p:spPr>
-        <p:txBody>
-          <a:bodyPr wrap="square">
-            <a:spAutoFit/>
-          </a:bodyPr>
-          <a:lstStyle/>
-          <a:p>
-            <a:r>
-              <a:rPr sz="800" b="1">
-                <a:solidFill>
-                  <a:srgbClr val="EA580D"/>
-                </a:solidFill>
-              </a:rPr>
-              <a:t>AI COACH PROMPT</a:t>
-            </a:r>
-          </a:p>
-          <a:p>
-            <a:r>
-              <a:rPr sz="700">
-                <a:solidFill>
-                  <a:srgbClr val="64748B"/>
-                </a:solidFill>
-              </a:rPr>
-              <a:t>Copy the text below and paste it into ChatGPT, Claude, or any AI tool:</a:t>
-            </a:r>
-          </a:p>
-          <a:p>
-            <a:r>
-              <a:rPr sz="700" i="1">
-                <a:solidFill>
-                  <a:srgbClr val="0F172A"/>
-                </a:solidFill>
-              </a:rPr>
-              <a:t>I am building [describe your startup in 2-3 sentences]. Help me build my pitch narrative. For each of these 10 elements (Hook, Problem, Solution, Market, Product, Business Model, Traction, Team, Vision, The Ask), ask me about:
-1. Key Narrative - the core message for this element
-2. Proof Points - what backs it up and makes it credible
-3. So What...</a:t>
-            </a:r>
-          </a:p>
-        </p:txBody>
-      </p:sp>
     </p:spTree>
   </p:cSld>
   <p:clrMapOvr>
@@ -6048,69 +5829,6 @@
           </a:p>
         </p:txBody>
       </p:sp>
-      <p:sp>
-        <p:nvSpPr>
-          <p:cNvPr id="4" name="TextBox 3"/>
-          <p:cNvSpPr txBox="1"/>
-          <p:nvPr/>
-        </p:nvSpPr>
-        <p:spPr>
-          <a:xfrm>
-            <a:off x="457200" y="5029200"/>
-            <a:ext cx="8229600" cy="1645920"/>
-          </a:xfrm>
-          <a:prstGeom prst="rect">
-            <a:avLst/>
-          </a:prstGeom>
-          <a:solidFill>
-            <a:srgbClr val="FFF7ED"/>
-          </a:solidFill>
-          <a:ln w="12700">
-            <a:solidFill>
-              <a:srgbClr val="EA580D"/>
-            </a:solidFill>
-          </a:ln>
-        </p:spPr>
-        <p:txBody>
-          <a:bodyPr wrap="square">
-            <a:spAutoFit/>
-          </a:bodyPr>
-          <a:lstStyle/>
-          <a:p>
-            <a:r>
-              <a:rPr sz="800" b="1">
-                <a:solidFill>
-                  <a:srgbClr val="EA580D"/>
-                </a:solidFill>
-              </a:rPr>
-              <a:t>AI COACH PROMPT</a:t>
-            </a:r>
-          </a:p>
-          <a:p>
-            <a:r>
-              <a:rPr sz="700">
-                <a:solidFill>
-                  <a:srgbClr val="64748B"/>
-                </a:solidFill>
-              </a:rPr>
-              <a:t>Copy the text below and paste it into ChatGPT, Claude, or any AI tool:</a:t>
-            </a:r>
-          </a:p>
-          <a:p>
-            <a:r>
-              <a:rPr sz="700" i="1">
-                <a:solidFill>
-                  <a:srgbClr val="0F172A"/>
-                </a:solidFill>
-              </a:rPr>
-              <a:t>I am building [describe your startup in 2-3 sentences]. Help me build my pitch narrative. For each of these 10 elements (Hook, Problem, Solution, Market, Product, Business Model, Traction, Team, Vision, The Ask), ask me about:
-1. Key Narrative - the core message for this element
-2. Proof Points - what backs it up and makes it credible
-3. So What...</a:t>
-            </a:r>
-          </a:p>
-        </p:txBody>
-      </p:sp>
     </p:spTree>
   </p:cSld>
   <p:clrMapOvr>
@@ -6375,69 +6093,6 @@
           </a:p>
         </p:txBody>
       </p:sp>
-      <p:sp>
-        <p:nvSpPr>
-          <p:cNvPr id="4" name="TextBox 3"/>
-          <p:cNvSpPr txBox="1"/>
-          <p:nvPr/>
-        </p:nvSpPr>
-        <p:spPr>
-          <a:xfrm>
-            <a:off x="457200" y="5029200"/>
-            <a:ext cx="8229600" cy="1645920"/>
-          </a:xfrm>
-          <a:prstGeom prst="rect">
-            <a:avLst/>
-          </a:prstGeom>
-          <a:solidFill>
-            <a:srgbClr val="FFF7ED"/>
-          </a:solidFill>
-          <a:ln w="12700">
-            <a:solidFill>
-              <a:srgbClr val="EA580D"/>
-            </a:solidFill>
-          </a:ln>
-        </p:spPr>
-        <p:txBody>
-          <a:bodyPr wrap="square">
-            <a:spAutoFit/>
-          </a:bodyPr>
-          <a:lstStyle/>
-          <a:p>
-            <a:r>
-              <a:rPr sz="800" b="1">
-                <a:solidFill>
-                  <a:srgbClr val="EA580D"/>
-                </a:solidFill>
-              </a:rPr>
-              <a:t>AI COACH PROMPT</a:t>
-            </a:r>
-          </a:p>
-          <a:p>
-            <a:r>
-              <a:rPr sz="700">
-                <a:solidFill>
-                  <a:srgbClr val="64748B"/>
-                </a:solidFill>
-              </a:rPr>
-              <a:t>Copy the text below and paste it into ChatGPT, Claude, or any AI tool:</a:t>
-            </a:r>
-          </a:p>
-          <a:p>
-            <a:r>
-              <a:rPr sz="700" i="1">
-                <a:solidFill>
-                  <a:srgbClr val="0F172A"/>
-                </a:solidFill>
-              </a:rPr>
-              <a:t>I am building [describe your startup in 2-3 sentences]. Help me build my pitch narrative. For each of these 10 elements (Hook, Problem, Solution, Market, Product, Business Model, Traction, Team, Vision, The Ask), ask me about:
-1. Key Narrative - the core message for this element
-2. Proof Points - what backs it up and makes it credible
-3. So What...</a:t>
-            </a:r>
-          </a:p>
-        </p:txBody>
-      </p:sp>
     </p:spTree>
   </p:cSld>
   <p:clrMapOvr>
@@ -6684,69 +6339,6 @@
                 <a:latin typeface="Calibri"/>
               </a:rPr>
               <a:t>How does this become a large company?</a:t>
-            </a:r>
-          </a:p>
-        </p:txBody>
-      </p:sp>
-      <p:sp>
-        <p:nvSpPr>
-          <p:cNvPr id="4" name="TextBox 3"/>
-          <p:cNvSpPr txBox="1"/>
-          <p:nvPr/>
-        </p:nvSpPr>
-        <p:spPr>
-          <a:xfrm>
-            <a:off x="457200" y="5029200"/>
-            <a:ext cx="8229600" cy="1645920"/>
-          </a:xfrm>
-          <a:prstGeom prst="rect">
-            <a:avLst/>
-          </a:prstGeom>
-          <a:solidFill>
-            <a:srgbClr val="FFF7ED"/>
-          </a:solidFill>
-          <a:ln w="12700">
-            <a:solidFill>
-              <a:srgbClr val="EA580D"/>
-            </a:solidFill>
-          </a:ln>
-        </p:spPr>
-        <p:txBody>
-          <a:bodyPr wrap="square">
-            <a:spAutoFit/>
-          </a:bodyPr>
-          <a:lstStyle/>
-          <a:p>
-            <a:r>
-              <a:rPr sz="800" b="1">
-                <a:solidFill>
-                  <a:srgbClr val="EA580D"/>
-                </a:solidFill>
-              </a:rPr>
-              <a:t>AI COACH PROMPT</a:t>
-            </a:r>
-          </a:p>
-          <a:p>
-            <a:r>
-              <a:rPr sz="700">
-                <a:solidFill>
-                  <a:srgbClr val="64748B"/>
-                </a:solidFill>
-              </a:rPr>
-              <a:t>Copy the text below and paste it into ChatGPT, Claude, or any AI tool:</a:t>
-            </a:r>
-          </a:p>
-          <a:p>
-            <a:r>
-              <a:rPr sz="700" i="1">
-                <a:solidFill>
-                  <a:srgbClr val="0F172A"/>
-                </a:solidFill>
-              </a:rPr>
-              <a:t>I am building [describe your startup in 2-3 sentences]. Help me build my pitch narrative. For each of these 10 elements (Hook, Problem, Solution, Market, Product, Business Model, Traction, Team, Vision, The Ask), ask me about:
-1. Key Narrative - the core message for this element
-2. Proof Points - what backs it up and makes it credible
-3. So What...</a:t>
             </a:r>
           </a:p>
         </p:txBody>
